--- a/courses/learn_yosys/module06-01-yosys-cli/slides.pptx
+++ b/courses/learn_yosys/module06-01-yosys-cli/slides.pptx
@@ -612,6 +612,146 @@
 </file>
 
 <file path=ppt/notesSlides/notesSlide11.xml><?xml version="1.0" encoding="utf-8"?>
+<p:notes xmlns:a="http://schemas.openxmlformats.org/drawingml/2006/main" xmlns:p="http://schemas.openxmlformats.org/presentationml/2006/main" xmlns:r="http://schemas.openxmlformats.org/officeDocument/2006/relationships">
+  <p:cSld>
+    <p:spTree>
+      <p:nvGrpSpPr>
+        <p:cNvPr id="1" name=""/>
+        <p:cNvGrpSpPr/>
+        <p:nvPr/>
+      </p:nvGrpSpPr>
+      <p:grpSpPr>
+        <a:xfrm>
+          <a:off x="0" y="0"/>
+          <a:ext cx="0" cy="0"/>
+          <a:chOff x="0" y="0"/>
+          <a:chExt cx="0" cy="0"/>
+        </a:xfrm>
+      </p:grpSpPr>
+      <p:sp>
+        <p:nvSpPr>
+          <p:cNvPr id="2" name="Slide Image Placeholder 1"/>
+          <p:cNvSpPr>
+            <a:spLocks noGrp="1"/>
+          </p:cNvSpPr>
+          <p:nvPr>
+            <p:ph type="sldImg" idx="2"/>
+          </p:nvPr>
+        </p:nvSpPr>
+        <p:spPr/>
+      </p:sp>
+      <p:sp>
+        <p:nvSpPr>
+          <p:cNvPr id="3" name="Notes Placeholder 2"/>
+          <p:cNvSpPr>
+            <a:spLocks noGrp="1"/>
+          </p:cNvSpPr>
+          <p:nvPr>
+            <p:ph type="body" idx="3" sz="quarter"/>
+          </p:nvPr>
+        </p:nvSpPr>
+        <p:spPr/>
+        <p:txBody>
+          <a:bodyPr/>
+          <a:lstStyle/>
+          <a:p>
+            <a:r>
+              <a:t>From the common folder, run the real solvers self-test, or call `pass_cli_check` directly.</a:t>
+            </a:r>
+          </a:p>
+        </p:txBody>
+      </p:sp>
+      <p:sp>
+        <p:nvSpPr>
+          <p:cNvPr id="4" name="Slide Number Placeholder 3"/>
+          <p:cNvSpPr>
+            <a:spLocks noGrp="1"/>
+          </p:cNvSpPr>
+          <p:nvPr>
+            <p:ph type="sldNum" idx="5" sz="quarter"/>
+          </p:nvPr>
+        </p:nvSpPr>
+        <p:spPr/>
+      </p:sp>
+    </p:spTree>
+  </p:cSld>
+  <p:clrMapOvr>
+    <a:masterClrMapping/>
+  </p:clrMapOvr>
+</p:notes>
+</file>
+
+<file path=ppt/notesSlides/notesSlide12.xml><?xml version="1.0" encoding="utf-8"?>
+<p:notes xmlns:a="http://schemas.openxmlformats.org/drawingml/2006/main" xmlns:p="http://schemas.openxmlformats.org/presentationml/2006/main" xmlns:r="http://schemas.openxmlformats.org/officeDocument/2006/relationships">
+  <p:cSld>
+    <p:spTree>
+      <p:nvGrpSpPr>
+        <p:cNvPr id="1" name=""/>
+        <p:cNvGrpSpPr/>
+        <p:nvPr/>
+      </p:nvGrpSpPr>
+      <p:grpSpPr>
+        <a:xfrm>
+          <a:off x="0" y="0"/>
+          <a:ext cx="0" cy="0"/>
+          <a:chOff x="0" y="0"/>
+          <a:chExt cx="0" cy="0"/>
+        </a:xfrm>
+      </p:grpSpPr>
+      <p:sp>
+        <p:nvSpPr>
+          <p:cNvPr id="2" name="Slide Image Placeholder 1"/>
+          <p:cNvSpPr>
+            <a:spLocks noGrp="1"/>
+          </p:cNvSpPr>
+          <p:nvPr>
+            <p:ph type="sldImg" idx="2"/>
+          </p:nvPr>
+        </p:nvSpPr>
+        <p:spPr/>
+      </p:sp>
+      <p:sp>
+        <p:nvSpPr>
+          <p:cNvPr id="3" name="Notes Placeholder 2"/>
+          <p:cNvSpPr>
+            <a:spLocks noGrp="1"/>
+          </p:cNvSpPr>
+          <p:nvPr>
+            <p:ph type="body" idx="3" sz="quarter"/>
+          </p:nvPr>
+        </p:nvSpPr>
+        <p:spPr/>
+        <p:txBody>
+          <a:bodyPr/>
+          <a:lstStyle/>
+          <a:p>
+            <a:r>
+              <a:t>Here is the check in plain steps.</a:t>
+            </a:r>
+          </a:p>
+        </p:txBody>
+      </p:sp>
+      <p:sp>
+        <p:nvSpPr>
+          <p:cNvPr id="4" name="Slide Number Placeholder 3"/>
+          <p:cNvSpPr>
+            <a:spLocks noGrp="1"/>
+          </p:cNvSpPr>
+          <p:nvPr>
+            <p:ph type="sldNum" idx="5" sz="quarter"/>
+          </p:nvPr>
+        </p:nvSpPr>
+        <p:spPr/>
+      </p:sp>
+    </p:spTree>
+  </p:cSld>
+  <p:clrMapOvr>
+    <a:masterClrMapping/>
+  </p:clrMapOvr>
+</p:notes>
+</file>
+
+<file path=ppt/notesSlides/notesSlide13.xml><?xml version="1.0" encoding="utf-8"?>
 <p:notes xmlns:a="http://schemas.openxmlformats.org/drawingml/2006/main" xmlns:p="http://schemas.openxmlformats.org/presentationml/2006/main" xmlns:r="http://schemas.openxmlformats.org/officeDocument/2006/relationships">
   <p:cSld>
     <p:spTree>
@@ -4563,7 +4703,28 @@
             <a:noAutofit/>
           </a:bodyPr>
           <a:lstStyle/>
-          <a:p/>
+          <a:p>
+            <a:pPr lvl="0" marL="457200" indent="-228600">
+              <a:buFont typeface="Calibri"/>
+              <a:spcAft>
+                <a:spcPts val="1000"/>
+              </a:spcAft>
+              <a:buSzPct val="100000"/>
+              <a:buChar char="•"/>
+              <a:lnSpc>
+                <a:spcPts val="2200"/>
+              </a:lnSpc>
+            </a:pPr>
+            <a:r>
+              <a:rPr sz="2000" b="0">
+                <a:solidFill>
+                  <a:srgbClr val="333333"/>
+                </a:solidFill>
+                <a:latin typeface="Calibri"/>
+              </a:rPr>
+              <a:t>From the common folder, run the real solvers self-test, or call `pass_cli_check` directly</a:t>
+            </a:r>
+          </a:p>
         </p:txBody>
       </p:sp>
       <p:sp>
@@ -4720,26 +4881,7 @@
                 </a:solidFill>
                 <a:latin typeface="Consolas"/>
               </a:rPr>
-              <a:t>python3 -c "from real_solvers import pass_cli_check;</a:t>
-            </a:r>
-          </a:p>
-          <a:p>
-            <a:pPr>
-              <a:lnSpc>
-                <a:spcPts val="2200"/>
-              </a:lnSpc>
-              <a:spcAft>
-                <a:spcPts val="400"/>
-              </a:spcAft>
-            </a:pPr>
-            <a:r>
-              <a:rPr sz="2000" b="0">
-                <a:solidFill>
-                  <a:srgbClr val="333333"/>
-                </a:solidFill>
-                <a:latin typeface="Consolas"/>
-              </a:rPr>
-              <a:t>print(pass_cli_check())"</a:t>
+              <a:t>python3 real_solvers.py</a:t>
             </a:r>
           </a:p>
         </p:txBody>
@@ -4861,7 +5003,28 @@
             <a:noAutofit/>
           </a:bodyPr>
           <a:lstStyle/>
-          <a:p/>
+          <a:p>
+            <a:pPr lvl="0" marL="457200" indent="-228600">
+              <a:buFont typeface="Calibri"/>
+              <a:spcAft>
+                <a:spcPts val="1000"/>
+              </a:spcAft>
+              <a:buSzPct val="100000"/>
+              <a:buChar char="•"/>
+              <a:lnSpc>
+                <a:spcPts val="2200"/>
+              </a:lnSpc>
+            </a:pPr>
+            <a:r>
+              <a:rPr sz="2000" b="0">
+                <a:solidFill>
+                  <a:srgbClr val="333333"/>
+                </a:solidFill>
+                <a:latin typeface="Calibri"/>
+              </a:rPr>
+              <a:t>Here is the check in plain steps</a:t>
+            </a:r>
+          </a:p>
         </p:txBody>
       </p:sp>
       <p:sp>
@@ -4999,7 +5162,7 @@
                 </a:solidFill>
                 <a:latin typeface="Consolas"/>
               </a:rPr>
-              <a:t>recipe ← []; append read_verilog; hierarchy; proc; ok ← prefix</a:t>
+              <a:t>append read_verilog; hierarchy; proc</a:t>
             </a:r>
           </a:p>
           <a:p>
@@ -5018,7 +5181,7 @@
                 </a:solidFill>
                 <a:latin typeface="Consolas"/>
               </a:rPr>
-              <a:t>matches golden</a:t>
+              <a:t>ok if prefix matches golden</a:t>
             </a:r>
           </a:p>
         </p:txBody>
